--- a/Список_подарков_презентация.pptx
+++ b/Список_подарков_презентация.pptx
@@ -1812,7 +1812,7 @@
                 <a:ea typeface="Trebuchet MS" pitchFamily="34" charset="-122"/>
                 <a:cs typeface="Trebuchet MS" pitchFamily="34" charset="-120"/>
               </a:rPr>
-              <a:t>Веб-приложение на Java</a:t>
+              <a:t>Веб-приложение на Java и Spring Boot</a:t>
             </a:r>
             <a:endParaRPr lang="en-US" sz="2400" dirty="0"/>
           </a:p>
@@ -3869,7 +3869,7 @@
                 <a:ea typeface="Trebuchet MS" pitchFamily="34" charset="-122"/>
                 <a:cs typeface="Trebuchet MS" pitchFamily="34" charset="-120"/>
               </a:rPr>
-              <a:t>Встроенный HTTP-сервер Java — на нём работает сайт</a:t>
+              <a:t>Spring Boot — на нём работает сайт</a:t>
             </a:r>
             <a:endParaRPr lang="en-US" sz="2400" dirty="0"/>
           </a:p>
@@ -3972,7 +3972,7 @@
                 <a:ea typeface="Trebuchet MS" pitchFamily="34" charset="-122"/>
                 <a:cs typeface="Trebuchet MS" pitchFamily="34" charset="-120"/>
               </a:rPr>
-              <a:t>Данные хранятся в базе данных H2</a:t>
+              <a:t>Данные хранятся в базе H2 (Spring Data JPA)</a:t>
             </a:r>
             <a:endParaRPr lang="en-US" sz="2400" dirty="0"/>
           </a:p>
@@ -4178,7 +4178,7 @@
                 <a:ea typeface="Trebuchet MS" pitchFamily="34" charset="-122"/>
                 <a:cs typeface="Trebuchet MS" pitchFamily="34" charset="-120"/>
               </a:rPr>
-              <a:t>Ничего ставить не нужно, достаточно JDK</a:t>
+              <a:t>Достаточно JDK и Maven, сервер ставить не нужно</a:t>
             </a:r>
             <a:endParaRPr lang="en-US" sz="2400" dirty="0"/>
           </a:p>

--- a/Список_подарков_презентация.pptx
+++ b/Список_подарков_презентация.pptx
@@ -4075,7 +4075,7 @@
                 <a:ea typeface="Trebuchet MS" pitchFamily="34" charset="-122"/>
                 <a:cs typeface="Trebuchet MS" pitchFamily="34" charset="-120"/>
               </a:rPr>
-              <a:t>HTML и CSS — внешний вид страниц</a:t>
+              <a:t>Thymeleaf, HTML и CSS — страницы</a:t>
             </a:r>
             <a:endParaRPr lang="en-US" sz="2400" dirty="0"/>
           </a:p>
